--- a/doku/Werkstatt-Cockpit-Workshop.pptx
+++ b/doku/Werkstatt-Cockpit-Workshop.pptx
@@ -17,9 +17,10 @@
     <p:sldId id="265" r:id="rId11"/>
     <p:sldId id="266" r:id="rId12"/>
     <p:sldId id="267" r:id="rId13"/>
+    <p:sldId id="268" r:id="rId14"/>
   </p:sldIdLst>
   <p:notesMasterIdLst>
-    <p:notesMasterId r:id="rId14"/>
+    <p:notesMasterId r:id="rId15"/>
   </p:notesMasterIdLst>
   <p:sldSz cx="12192000" cy="6858000"/>
   <p:notesSz cx="6858000" cy="12192000"/>
@@ -513,7 +514,7 @@
           <a:p>
             <a:r>
               <a:rPr lang="en-US" dirty="0"/>
-              <a:t>Begrüßung. Ein Satz, worum es geht: Wir haben unsere gesamte Werkstatt-Organisation – Schichtplan, Schichtbuch, Wartung, OEE – in ein eigenes Programm gebracht. Seit Juli produktiv, seit dieser Woche komplett ohne OneDrive. Heute: 15 Minuten zeigen, was es kann, danach offene Runde.</a:t>
+              <a:t>Begrüßung. Diese Präsentation ist eine Einführung für alle – niemand muss etwas vorwissen. Ein Satz, worum es geht: Wir haben unsere gesamte Werkstatt-Organisation – Schichtplan, Schichtbuch, Wartung, OEE – in ein eigenes Programm gebracht. Seit Juli produktiv, komplett ohne OneDrive. Heute: 15-20 Minuten zeigen, was es kann, danach Live-Rundgang und offene Runde.</a:t>
             </a:r>
             <a:endParaRPr lang="en-US" dirty="0"/>
           </a:p>
@@ -601,7 +602,7 @@
           <a:p>
             <a:r>
               <a:rPr lang="en-US" dirty="0"/>
-              <a:t>Der Punkt, der selbstgebaute Software von Bastelei unterscheidet: Vor jeder Auslieferung laufen 41 Testreihen mit rund 700 Prüfungen automatisch durch – inklusive der hässlichen Fälle. Jede Zahl ist im Projekt nachvollziehbar dokumentiert.</a:t>
+              <a:t>Die Frage hinter dieser Folie: Kann etwas verlorengehen? Links die eingebauten Sicherungen beim ganz normalen Arbeiten. Rechts das, was wir absichtlich kaputt gemacht haben, um es zu testen – kaputte Datei, falsche Uhr, zwei Fenster, volles Laufwerk, Verbindungsabriss mitten im Speichern. In keinem Fall ging etwas verloren, und diese Tests laufen bei jeder neuen Programmversion automatisch wieder.</a:t>
             </a:r>
             <a:endParaRPr lang="en-US" dirty="0"/>
           </a:p>
@@ -689,7 +690,7 @@
           <a:p>
             <a:r>
               <a:rPr lang="en-US" dirty="0"/>
-              <a:t>Die drei Zahlen. Wichtig: bewusst konservativ gerechnet, alle Annahmen offen. Und keine Schönrederei – die gelbe Box sagt, was das Werkzeug NICHT kann und wann wir kaufen würden. Die vollständige Herleitung liegt als Entscheidungsvorlage bei.</a:t>
+              <a:t>Der Punkt, der selbstgebaute Software von Bastelei unterscheidet: Vor jeder Auslieferung laufen 41 Testreihen mit rund 700 Prüfungen automatisch durch. Erst wenn alle grün sind, wird eine neue Fassung verteilt. Jede Zahl ist im Projekt nachvollziehbar dokumentiert.</a:t>
             </a:r>
             <a:endParaRPr lang="en-US" dirty="0"/>
           </a:p>
@@ -777,7 +778,7 @@
           <a:p>
             <a:r>
               <a:rPr lang="en-US" dirty="0"/>
-              <a:t>Abschluss: die vier vereinbarten nächsten Schritte, Quellen für alle Zahlen. Dann Überleitung in den Live-Teil: das Programm selbst zeigen und Fragen sammeln.</a:t>
+              <a:t>Links: Das Programm hat rund 1 225 € gekostet – 50 Stunden Eigenleistung zu 24,50 €/h, keine Lizenzkosten. Rechts die Ersparnis, aufgeschlüsselt: Eine Kauf-Software würde jedes Jahr rund 4 200 € Lizenz kosten (bewusst das untere Marktende angesetzt, Marktpreise 20-100 €/Nutzer/Monat) und im ersten Jahr zusätzlich rund 8 000 € Einführung. Dazu der Zeitgewinn - der ist eine Annahme und wird nach drei Monaten mit echten Zahlen nachgemessen. Jahr 1 also rund 20 000 €, danach rund 12 000 € jedes Jahr.</a:t>
             </a:r>
             <a:endParaRPr lang="en-US" dirty="0"/>
           </a:p>
@@ -801,6 +802,94 @@
             <a:fld id="{F7021451-1387-4CA6-816F-3879F97B5CBC}" type="slidenum">
               <a:rPr lang="en-US"/>
               <a:t>12</a:t>
+            </a:fld>
+            <a:endParaRPr lang="en-US"/>
+          </a:p>
+        </p:txBody>
+      </p:sp>
+    </p:spTree>
+    <p:extLst>
+      <p:ext uri="{BB962C8B-B14F-4D97-AF65-F5344CB8AC3E}">
+        <p14:creationId xmlns:p14="http://schemas.microsoft.com/office/powerpoint/2010/main" val="1024086991"/>
+      </p:ext>
+    </p:extLst>
+  </p:cSld>
+  <p:clrMapOvr>
+    <a:masterClrMapping/>
+  </p:clrMapOvr>
+</p:notes>
+</file>
+
+<file path=ppt/notesSlides/notesSlide13.xml><?xml version="1.0" encoding="utf-8"?>
+<p:notes xmlns:a="http://schemas.openxmlformats.org/drawingml/2006/main" xmlns:r="http://schemas.openxmlformats.org/officeDocument/2006/relationships" xmlns:p="http://schemas.openxmlformats.org/presentationml/2006/main">
+  <p:cSld>
+    <p:spTree>
+      <p:nvGrpSpPr>
+        <p:cNvPr id="1" name=""/>
+        <p:cNvGrpSpPr/>
+        <p:nvPr/>
+      </p:nvGrpSpPr>
+      <p:grpSpPr>
+        <a:xfrm>
+          <a:off x="0" y="0"/>
+          <a:ext cx="0" cy="0"/>
+          <a:chOff x="0" y="0"/>
+          <a:chExt cx="0" cy="0"/>
+        </a:xfrm>
+      </p:grpSpPr>
+      <p:sp>
+        <p:nvSpPr>
+          <p:cNvPr id="2" name="Slide Image Placeholder 1"/>
+          <p:cNvSpPr>
+            <a:spLocks noGrp="1" noRot="1" noChangeAspect="1"/>
+          </p:cNvSpPr>
+          <p:nvPr>
+            <p:ph type="sldImg"/>
+          </p:nvPr>
+        </p:nvSpPr>
+        <p:spPr/>
+      </p:sp>
+      <p:sp>
+        <p:nvSpPr>
+          <p:cNvPr id="3" name="Notes Placeholder 2"/>
+          <p:cNvSpPr>
+            <a:spLocks noGrp="1"/>
+          </p:cNvSpPr>
+          <p:nvPr>
+            <p:ph type="body" idx="1"/>
+          </p:nvPr>
+        </p:nvSpPr>
+        <p:spPr/>
+        <p:txBody>
+          <a:bodyPr/>
+          <a:lstStyle/>
+          <a:p>
+            <a:r>
+              <a:rPr lang="en-US" dirty="0"/>
+              <a:t>Abschluss: die nächsten Schritte, Quellen für alle Zahlen. Zum Schwesterwerk: Wenn dort Interesse besteht, bekommt es eine eigene, unabhängige Ausgabe - eigene Datendatei auf dem dortigen Laufwerk, eigene Anlagen, eigenes Team, alles über das Zahnrad-Menü einstellbar. Kein Verbund, keine gegenseitige Abhängigkeit. Dann Überleitung in den Live-Teil: das Programm selbst zeigen und Fragen sammeln.</a:t>
+            </a:r>
+            <a:endParaRPr lang="en-US" dirty="0"/>
+          </a:p>
+        </p:txBody>
+      </p:sp>
+      <p:sp>
+        <p:nvSpPr>
+          <p:cNvPr id="4" name="Slide Number Placeholder 3"/>
+          <p:cNvSpPr>
+            <a:spLocks noGrp="1"/>
+          </p:cNvSpPr>
+          <p:nvPr>
+            <p:ph type="sldNum" sz="quarter" idx="10"/>
+          </p:nvPr>
+        </p:nvSpPr>
+        <p:spPr/>
+        <p:txBody>
+          <a:bodyPr/>
+          <a:lstStyle/>
+          <a:p>
+            <a:fld id="{F7021451-1387-4CA6-816F-3879F97B5CBC}" type="slidenum">
+              <a:rPr lang="en-US"/>
+              <a:t>13</a:t>
             </a:fld>
             <a:endParaRPr lang="en-US"/>
           </a:p>
@@ -1481,7 +1570,7 @@
           <a:p>
             <a:r>
               <a:rPr lang="en-US" dirty="0"/>
-              <a:t>Rechte in drei Rollen, gepflegt von Leitung und Vertretung. Ehrlich dazugesagt: Das ist eine Leitplanke gegen Versehen – echtes Sperren machen die Laufwerksrechte der IT. Wichtig für die Runde: keine Cloud, nichts verlässt das Haus.</a:t>
+              <a:t>Rechte in drei Rollen. Wichtige Frage aus der Praxis: Was ist, wenn ich nicht da bin? Antwort: Die Vertretung ist gleichberechtigter Verwalter und kann alles – Benutzer anlegen, Rechte ändern, Einstellungen. Das Programm läuft ohne mich unbegrenzt weiter, es gibt keinen Server und nichts, was abläuft. Ehrlich dazugesagt: Die Rollen sind eine Leitplanke gegen Versehen – echtes Sperren machen die Laufwerksrechte der IT.</a:t>
             </a:r>
             <a:endParaRPr lang="en-US" dirty="0"/>
           </a:p>
@@ -1965,7 +2054,7 @@
                 <a:ea typeface="Arial" pitchFamily="34" charset="-122"/>
                 <a:cs typeface="Arial" pitchFamily="34" charset="-120"/>
               </a:rPr>
-              <a:t>Workshop · 26.08.2026 · R. Ciraci, Werkstattleitung</a:t>
+              <a:t>Eine Einführung für alle · 26.08.2026 · R. Ciraci, Werkstattleitung</a:t>
             </a:r>
             <a:endParaRPr lang="en-US" sz="1300" dirty="0"/>
           </a:p>
@@ -2297,6 +2386,623 @@
 <file path=ppt/slides/slide10.xml><?xml version="1.0" encoding="utf-8"?>
 <p:sld xmlns:a="http://schemas.openxmlformats.org/drawingml/2006/main" xmlns:r="http://schemas.openxmlformats.org/officeDocument/2006/relationships" xmlns:p="http://schemas.openxmlformats.org/presentationml/2006/main">
   <p:cSld name="Slide 10">
+    <p:bg>
+      <p:bgPr>
+        <a:solidFill>
+          <a:srgbClr val="FFFFFF"/>
+        </a:solidFill>
+      </p:bgPr>
+    </p:bg>
+    <p:spTree>
+      <p:nvGrpSpPr>
+        <p:cNvPr id="1" name=""/>
+        <p:cNvGrpSpPr/>
+        <p:nvPr/>
+      </p:nvGrpSpPr>
+      <p:grpSpPr>
+        <a:xfrm>
+          <a:off x="0" y="0"/>
+          <a:ext cx="0" cy="0"/>
+          <a:chOff x="0" y="0"/>
+          <a:chExt cx="0" cy="0"/>
+        </a:xfrm>
+      </p:grpSpPr>
+      <p:sp>
+        <p:nvSpPr>
+          <p:cNvPr id="2" name="Text 0"/>
+          <p:cNvSpPr/>
+          <p:nvPr/>
+        </p:nvSpPr>
+        <p:spPr>
+          <a:xfrm>
+            <a:off x="822960" y="457200"/>
+            <a:ext cx="2926080" cy="292608"/>
+          </a:xfrm>
+          <a:prstGeom prst="rect">
+            <a:avLst/>
+          </a:prstGeom>
+          <a:noFill/>
+          <a:ln/>
+        </p:spPr>
+        <p:txBody>
+          <a:bodyPr wrap="square" lIns="0" tIns="0" rIns="0" bIns="0" rtlCol="0" anchor="ctr"/>
+          <a:lstStyle/>
+          <a:p>
+            <a:pPr indent="0" marL="0">
+              <a:buNone/>
+            </a:pPr>
+            <a:r>
+              <a:rPr lang="en-US" sz="1100" b="1" spc="200" kern="0" dirty="0">
+                <a:solidFill>
+                  <a:srgbClr val="C97A2B"/>
+                </a:solidFill>
+                <a:latin typeface="Arial" pitchFamily="34" charset="0"/>
+                <a:ea typeface="Arial" pitchFamily="34" charset="-122"/>
+                <a:cs typeface="Arial" pitchFamily="34" charset="-120"/>
+              </a:rPr>
+              <a:t>DATENSICHERHEIT</a:t>
+            </a:r>
+            <a:endParaRPr lang="en-US" sz="1100" dirty="0"/>
+          </a:p>
+        </p:txBody>
+      </p:sp>
+      <p:sp>
+        <p:nvSpPr>
+          <p:cNvPr id="3" name="Text 1"/>
+          <p:cNvSpPr/>
+          <p:nvPr/>
+        </p:nvSpPr>
+        <p:spPr>
+          <a:xfrm>
+            <a:off x="822960" y="822960"/>
+            <a:ext cx="11247120" cy="640080"/>
+          </a:xfrm>
+          <a:prstGeom prst="rect">
+            <a:avLst/>
+          </a:prstGeom>
+          <a:noFill/>
+          <a:ln/>
+        </p:spPr>
+        <p:txBody>
+          <a:bodyPr wrap="square" lIns="0" tIns="0" rIns="0" bIns="0" rtlCol="0" anchor="ctr"/>
+          <a:lstStyle/>
+          <a:p>
+            <a:pPr indent="0" marL="0">
+              <a:buNone/>
+            </a:pPr>
+            <a:r>
+              <a:rPr lang="en-US" sz="3000" b="1" dirty="0">
+                <a:solidFill>
+                  <a:srgbClr val="22262B"/>
+                </a:solidFill>
+                <a:latin typeface="Arial" pitchFamily="34" charset="0"/>
+                <a:ea typeface="Arial" pitchFamily="34" charset="-122"/>
+                <a:cs typeface="Arial" pitchFamily="34" charset="-120"/>
+              </a:rPr>
+              <a:t>Was passiert mit unseren Daten?</a:t>
+            </a:r>
+            <a:endParaRPr lang="en-US" sz="3000" dirty="0"/>
+          </a:p>
+        </p:txBody>
+      </p:sp>
+      <p:sp>
+        <p:nvSpPr>
+          <p:cNvPr id="4" name="Text 2"/>
+          <p:cNvSpPr/>
+          <p:nvPr/>
+        </p:nvSpPr>
+        <p:spPr>
+          <a:xfrm>
+            <a:off x="822960" y="1783080"/>
+            <a:ext cx="5120640" cy="365760"/>
+          </a:xfrm>
+          <a:prstGeom prst="rect">
+            <a:avLst/>
+          </a:prstGeom>
+          <a:noFill/>
+          <a:ln/>
+        </p:spPr>
+        <p:txBody>
+          <a:bodyPr wrap="square" lIns="0" tIns="0" rIns="0" bIns="0" rtlCol="0" anchor="ctr"/>
+          <a:lstStyle/>
+          <a:p>
+            <a:pPr indent="0" marL="0">
+              <a:buNone/>
+            </a:pPr>
+            <a:r>
+              <a:rPr lang="en-US" sz="1550" b="1" dirty="0">
+                <a:solidFill>
+                  <a:srgbClr val="2F6690"/>
+                </a:solidFill>
+                <a:latin typeface="Arial" pitchFamily="34" charset="0"/>
+                <a:ea typeface="Arial" pitchFamily="34" charset="-122"/>
+                <a:cs typeface="Arial" pitchFamily="34" charset="-120"/>
+              </a:rPr>
+              <a:t>So wird gespeichert</a:t>
+            </a:r>
+            <a:endParaRPr lang="en-US" sz="1550" dirty="0"/>
+          </a:p>
+        </p:txBody>
+      </p:sp>
+      <p:sp>
+        <p:nvSpPr>
+          <p:cNvPr id="5" name="Text 3"/>
+          <p:cNvSpPr/>
+          <p:nvPr/>
+        </p:nvSpPr>
+        <p:spPr>
+          <a:xfrm>
+            <a:off x="822960" y="2240280"/>
+            <a:ext cx="5120640" cy="3291840"/>
+          </a:xfrm>
+          <a:prstGeom prst="rect">
+            <a:avLst/>
+          </a:prstGeom>
+          <a:noFill/>
+          <a:ln/>
+        </p:spPr>
+        <p:txBody>
+          <a:bodyPr wrap="square" lIns="0" tIns="0" rIns="0" bIns="0" rtlCol="0" anchor="t"/>
+          <a:lstStyle/>
+          <a:p>
+            <a:pPr marL="177800" indent="-177800">
+              <a:spcAft>
+                <a:spcPts val="900"/>
+              </a:spcAft>
+              <a:buSzPct val="100000"/>
+              <a:buChar char="–"/>
+            </a:pPr>
+            <a:r>
+              <a:rPr lang="en-US" sz="1300" dirty="0">
+                <a:solidFill>
+                  <a:srgbClr val="22262B"/>
+                </a:solidFill>
+                <a:latin typeface="Arial" pitchFamily="34" charset="0"/>
+                <a:ea typeface="Arial" pitchFamily="34" charset="-122"/>
+                <a:cs typeface="Arial" pitchFamily="34" charset="-120"/>
+              </a:rPr>
+              <a:t>Änderungen werden Eintrag für Eintrag zusammengeführt – niemand überschreibt den anderen</a:t>
+            </a:r>
+            <a:endParaRPr lang="en-US" sz="1300" dirty="0"/>
+          </a:p>
+          <a:p>
+            <a:pPr marL="177800" indent="-177800">
+              <a:spcAft>
+                <a:spcPts val="900"/>
+              </a:spcAft>
+              <a:buSzPct val="100000"/>
+              <a:buChar char="–"/>
+            </a:pPr>
+            <a:r>
+              <a:rPr lang="en-US" sz="1300" dirty="0">
+                <a:solidFill>
+                  <a:srgbClr val="22262B"/>
+                </a:solidFill>
+                <a:latin typeface="Arial" pitchFamily="34" charset="0"/>
+                <a:ea typeface="Arial" pitchFamily="34" charset="-122"/>
+                <a:cs typeface="Arial" pitchFamily="34" charset="-120"/>
+              </a:rPr>
+              <a:t>Nach jedem Speichern wird die Datei zurückgelesen und geprüft: Ist noch alles da?</a:t>
+            </a:r>
+            <a:endParaRPr lang="en-US" sz="1300" dirty="0"/>
+          </a:p>
+          <a:p>
+            <a:pPr marL="177800" indent="-177800">
+              <a:spcAft>
+                <a:spcPts val="900"/>
+              </a:spcAft>
+              <a:buSzPct val="100000"/>
+              <a:buChar char="–"/>
+            </a:pPr>
+            <a:r>
+              <a:rPr lang="en-US" sz="1300" dirty="0">
+                <a:solidFill>
+                  <a:srgbClr val="22262B"/>
+                </a:solidFill>
+                <a:latin typeface="Arial" pitchFamily="34" charset="0"/>
+                <a:ea typeface="Arial" pitchFamily="34" charset="-122"/>
+                <a:cs typeface="Arial" pitchFamily="34" charset="-120"/>
+              </a:rPr>
+              <a:t>Jedes Gerät legt beim Öffnen automatisch eine Sicherung an (14 Tage zurück) – dazu die tägliche Server-Sicherung der IT</a:t>
+            </a:r>
+            <a:endParaRPr lang="en-US" sz="1300" dirty="0"/>
+          </a:p>
+          <a:p>
+            <a:pPr marL="177800" indent="-177800">
+              <a:spcAft>
+                <a:spcPts val="900"/>
+              </a:spcAft>
+              <a:buSzPct val="100000"/>
+              <a:buChar char="–"/>
+            </a:pPr>
+            <a:r>
+              <a:rPr lang="en-US" sz="1300" dirty="0">
+                <a:solidFill>
+                  <a:srgbClr val="22262B"/>
+                </a:solidFill>
+                <a:latin typeface="Arial" pitchFamily="34" charset="0"/>
+                <a:ea typeface="Arial" pitchFamily="34" charset="-122"/>
+                <a:cs typeface="Arial" pitchFamily="34" charset="-120"/>
+              </a:rPr>
+              <a:t>Löschungen laufen über eine 180-Tage-Merkliste – nichts verschwindet unbemerkt</a:t>
+            </a:r>
+            <a:endParaRPr lang="en-US" sz="1300" dirty="0"/>
+          </a:p>
+        </p:txBody>
+      </p:sp>
+      <p:sp>
+        <p:nvSpPr>
+          <p:cNvPr id="6" name="Text 4"/>
+          <p:cNvSpPr/>
+          <p:nvPr/>
+        </p:nvSpPr>
+        <p:spPr>
+          <a:xfrm>
+            <a:off x="6400800" y="1783080"/>
+            <a:ext cx="4937760" cy="365760"/>
+          </a:xfrm>
+          <a:prstGeom prst="rect">
+            <a:avLst/>
+          </a:prstGeom>
+          <a:noFill/>
+          <a:ln/>
+        </p:spPr>
+        <p:txBody>
+          <a:bodyPr wrap="square" lIns="0" tIns="0" rIns="0" bIns="0" rtlCol="0" anchor="ctr"/>
+          <a:lstStyle/>
+          <a:p>
+            <a:pPr indent="0" marL="0">
+              <a:buNone/>
+            </a:pPr>
+            <a:r>
+              <a:rPr lang="en-US" sz="1550" b="1" dirty="0">
+                <a:solidFill>
+                  <a:srgbClr val="B23A34"/>
+                </a:solidFill>
+                <a:latin typeface="Arial" pitchFamily="34" charset="0"/>
+                <a:ea typeface="Arial" pitchFamily="34" charset="-122"/>
+                <a:cs typeface="Arial" pitchFamily="34" charset="-120"/>
+              </a:rPr>
+              <a:t>Absichtlich kaputt gemacht – und geprüft</a:t>
+            </a:r>
+            <a:endParaRPr lang="en-US" sz="1550" dirty="0"/>
+          </a:p>
+        </p:txBody>
+      </p:sp>
+      <p:sp>
+        <p:nvSpPr>
+          <p:cNvPr id="7" name="Text 5"/>
+          <p:cNvSpPr/>
+          <p:nvPr/>
+        </p:nvSpPr>
+        <p:spPr>
+          <a:xfrm>
+            <a:off x="6400800" y="2240280"/>
+            <a:ext cx="4937760" cy="3291840"/>
+          </a:xfrm>
+          <a:prstGeom prst="rect">
+            <a:avLst/>
+          </a:prstGeom>
+          <a:noFill/>
+          <a:ln/>
+        </p:spPr>
+        <p:txBody>
+          <a:bodyPr wrap="square" lIns="0" tIns="0" rIns="0" bIns="0" rtlCol="0" anchor="t"/>
+          <a:lstStyle/>
+          <a:p>
+            <a:pPr indent="0" marL="0">
+              <a:buNone/>
+            </a:pPr>
+            <a:r>
+              <a:rPr lang="en-US" sz="1300" b="1" dirty="0">
+                <a:solidFill>
+                  <a:srgbClr val="2F7D4F"/>
+                </a:solidFill>
+                <a:latin typeface="Arial" pitchFamily="34" charset="0"/>
+                <a:ea typeface="Arial" pitchFamily="34" charset="-122"/>
+                <a:cs typeface="Arial" pitchFamily="34" charset="-120"/>
+              </a:rPr>
+              <a:t>✓  </a:t>
+            </a:r>
+            <a:pPr indent="0" marL="0">
+              <a:spcAft>
+                <a:spcPts val="900"/>
+              </a:spcAft>
+              <a:buNone/>
+            </a:pPr>
+            <a:r>
+              <a:rPr lang="en-US" sz="1300" dirty="0">
+                <a:solidFill>
+                  <a:srgbClr val="22262B"/>
+                </a:solidFill>
+                <a:latin typeface="Arial" pitchFamily="34" charset="0"/>
+                <a:ea typeface="Arial" pitchFamily="34" charset="-122"/>
+                <a:cs typeface="Arial" pitchFamily="34" charset="-120"/>
+              </a:rPr>
+              <a:t>Beschädigte, halb geschriebene Datendatei</a:t>
+            </a:r>
+            <a:endParaRPr lang="en-US" sz="1300" dirty="0"/>
+          </a:p>
+          <a:p>
+            <a:pPr indent="0" marL="0">
+              <a:buNone/>
+            </a:pPr>
+            <a:r>
+              <a:rPr lang="en-US" sz="1300" b="1" dirty="0">
+                <a:solidFill>
+                  <a:srgbClr val="2F7D4F"/>
+                </a:solidFill>
+                <a:latin typeface="Arial" pitchFamily="34" charset="0"/>
+                <a:ea typeface="Arial" pitchFamily="34" charset="-122"/>
+                <a:cs typeface="Arial" pitchFamily="34" charset="-120"/>
+              </a:rPr>
+              <a:t>✓  </a:t>
+            </a:r>
+            <a:pPr indent="0" marL="0">
+              <a:spcAft>
+                <a:spcPts val="900"/>
+              </a:spcAft>
+              <a:buNone/>
+            </a:pPr>
+            <a:r>
+              <a:rPr lang="en-US" sz="1300" dirty="0">
+                <a:solidFill>
+                  <a:srgbClr val="22262B"/>
+                </a:solidFill>
+                <a:latin typeface="Arial" pitchFamily="34" charset="0"/>
+                <a:ea typeface="Arial" pitchFamily="34" charset="-122"/>
+                <a:cs typeface="Arial" pitchFamily="34" charset="-120"/>
+              </a:rPr>
+              <a:t>Falsch gehende Rechneruhr</a:t>
+            </a:r>
+            <a:endParaRPr lang="en-US" sz="1300" dirty="0"/>
+          </a:p>
+          <a:p>
+            <a:pPr indent="0" marL="0">
+              <a:buNone/>
+            </a:pPr>
+            <a:r>
+              <a:rPr lang="en-US" sz="1300" b="1" dirty="0">
+                <a:solidFill>
+                  <a:srgbClr val="2F7D4F"/>
+                </a:solidFill>
+                <a:latin typeface="Arial" pitchFamily="34" charset="0"/>
+                <a:ea typeface="Arial" pitchFamily="34" charset="-122"/>
+                <a:cs typeface="Arial" pitchFamily="34" charset="-120"/>
+              </a:rPr>
+              <a:t>✓  </a:t>
+            </a:r>
+            <a:pPr indent="0" marL="0">
+              <a:spcAft>
+                <a:spcPts val="900"/>
+              </a:spcAft>
+              <a:buNone/>
+            </a:pPr>
+            <a:r>
+              <a:rPr lang="en-US" sz="1300" dirty="0">
+                <a:solidFill>
+                  <a:srgbClr val="22262B"/>
+                </a:solidFill>
+                <a:latin typeface="Arial" pitchFamily="34" charset="0"/>
+                <a:ea typeface="Arial" pitchFamily="34" charset="-122"/>
+                <a:cs typeface="Arial" pitchFamily="34" charset="-120"/>
+              </a:rPr>
+              <a:t>Zwei Fenster gleichzeitig auf derselben Datei</a:t>
+            </a:r>
+            <a:endParaRPr lang="en-US" sz="1300" dirty="0"/>
+          </a:p>
+          <a:p>
+            <a:pPr indent="0" marL="0">
+              <a:buNone/>
+            </a:pPr>
+            <a:r>
+              <a:rPr lang="en-US" sz="1300" b="1" dirty="0">
+                <a:solidFill>
+                  <a:srgbClr val="2F7D4F"/>
+                </a:solidFill>
+                <a:latin typeface="Arial" pitchFamily="34" charset="0"/>
+                <a:ea typeface="Arial" pitchFamily="34" charset="-122"/>
+                <a:cs typeface="Arial" pitchFamily="34" charset="-120"/>
+              </a:rPr>
+              <a:t>✓  </a:t>
+            </a:r>
+            <a:pPr indent="0" marL="0">
+              <a:spcAft>
+                <a:spcPts val="900"/>
+              </a:spcAft>
+              <a:buNone/>
+            </a:pPr>
+            <a:r>
+              <a:rPr lang="en-US" sz="1300" dirty="0">
+                <a:solidFill>
+                  <a:srgbClr val="22262B"/>
+                </a:solidFill>
+                <a:latin typeface="Arial" pitchFamily="34" charset="0"/>
+                <a:ea typeface="Arial" pitchFamily="34" charset="-122"/>
+                <a:cs typeface="Arial" pitchFamily="34" charset="-120"/>
+              </a:rPr>
+              <a:t>Volle Speichergrenze des Browsers</a:t>
+            </a:r>
+            <a:endParaRPr lang="en-US" sz="1300" dirty="0"/>
+          </a:p>
+          <a:p>
+            <a:pPr indent="0" marL="0">
+              <a:buNone/>
+            </a:pPr>
+            <a:r>
+              <a:rPr lang="en-US" sz="1300" b="1" dirty="0">
+                <a:solidFill>
+                  <a:srgbClr val="2F7D4F"/>
+                </a:solidFill>
+                <a:latin typeface="Arial" pitchFamily="34" charset="0"/>
+                <a:ea typeface="Arial" pitchFamily="34" charset="-122"/>
+                <a:cs typeface="Arial" pitchFamily="34" charset="-120"/>
+              </a:rPr>
+              <a:t>✓  </a:t>
+            </a:r>
+            <a:pPr indent="0" marL="0">
+              <a:spcAft>
+                <a:spcPts val="900"/>
+              </a:spcAft>
+              <a:buNone/>
+            </a:pPr>
+            <a:r>
+              <a:rPr lang="en-US" sz="1300" dirty="0">
+                <a:solidFill>
+                  <a:srgbClr val="22262B"/>
+                </a:solidFill>
+                <a:latin typeface="Arial" pitchFamily="34" charset="0"/>
+                <a:ea typeface="Arial" pitchFamily="34" charset="-122"/>
+                <a:cs typeface="Arial" pitchFamily="34" charset="-120"/>
+              </a:rPr>
+              <a:t>Laufwerk mitten im Speichern nicht erreichbar</a:t>
+            </a:r>
+            <a:endParaRPr lang="en-US" sz="1300" dirty="0"/>
+          </a:p>
+          <a:p>
+            <a:pPr indent="0" marL="0">
+              <a:buNone/>
+            </a:pPr>
+            <a:r>
+              <a:rPr lang="en-US" sz="1300" b="1" dirty="0">
+                <a:solidFill>
+                  <a:srgbClr val="2F7D4F"/>
+                </a:solidFill>
+                <a:latin typeface="Arial" pitchFamily="34" charset="0"/>
+                <a:ea typeface="Arial" pitchFamily="34" charset="-122"/>
+                <a:cs typeface="Arial" pitchFamily="34" charset="-120"/>
+              </a:rPr>
+              <a:t>✓  </a:t>
+            </a:r>
+            <a:pPr indent="0" marL="0">
+              <a:spcAft>
+                <a:spcPts val="900"/>
+              </a:spcAft>
+              <a:buNone/>
+            </a:pPr>
+            <a:r>
+              <a:rPr lang="en-US" sz="1300" dirty="0">
+                <a:solidFill>
+                  <a:srgbClr val="22262B"/>
+                </a:solidFill>
+                <a:latin typeface="Arial" pitchFamily="34" charset="0"/>
+                <a:ea typeface="Arial" pitchFamily="34" charset="-122"/>
+                <a:cs typeface="Arial" pitchFamily="34" charset="-120"/>
+              </a:rPr>
+              <a:t>Rechte-Entzug, während jemand gerade arbeitet</a:t>
+            </a:r>
+            <a:endParaRPr lang="en-US" sz="1300" dirty="0"/>
+          </a:p>
+          <a:p>
+            <a:pPr indent="0" marL="0">
+              <a:buNone/>
+            </a:pPr>
+            <a:r>
+              <a:rPr lang="en-US" sz="1300" b="1" dirty="0">
+                <a:solidFill>
+                  <a:srgbClr val="2F7D4F"/>
+                </a:solidFill>
+                <a:latin typeface="Arial" pitchFamily="34" charset="0"/>
+                <a:ea typeface="Arial" pitchFamily="34" charset="-122"/>
+                <a:cs typeface="Arial" pitchFamily="34" charset="-120"/>
+              </a:rPr>
+              <a:t>✓  </a:t>
+            </a:r>
+            <a:pPr indent="0" marL="0">
+              <a:buNone/>
+            </a:pPr>
+            <a:r>
+              <a:rPr lang="en-US" sz="1300" dirty="0">
+                <a:solidFill>
+                  <a:srgbClr val="22262B"/>
+                </a:solidFill>
+                <a:latin typeface="Arial" pitchFamily="34" charset="0"/>
+                <a:ea typeface="Arial" pitchFamily="34" charset="-122"/>
+                <a:cs typeface="Arial" pitchFamily="34" charset="-120"/>
+              </a:rPr>
+              <a:t>Dauertest: 16 951 Einträge aus sieben Jahrgängen</a:t>
+            </a:r>
+            <a:endParaRPr lang="en-US" sz="1300" dirty="0"/>
+          </a:p>
+        </p:txBody>
+      </p:sp>
+      <p:sp>
+        <p:nvSpPr>
+          <p:cNvPr id="8" name="Shape 6"/>
+          <p:cNvSpPr/>
+          <p:nvPr/>
+        </p:nvSpPr>
+        <p:spPr>
+          <a:xfrm>
+            <a:off x="822960" y="5349240"/>
+            <a:ext cx="10515600" cy="685800"/>
+          </a:xfrm>
+          <a:prstGeom prst="roundRect">
+            <a:avLst>
+              <a:gd name="adj" fmla="val 8000"/>
+            </a:avLst>
+          </a:prstGeom>
+          <a:solidFill>
+            <a:srgbClr val="EAF3EC"/>
+          </a:solidFill>
+          <a:ln w="12700">
+            <a:solidFill>
+              <a:srgbClr val="2F7D4F"/>
+            </a:solidFill>
+            <a:prstDash val="solid"/>
+          </a:ln>
+        </p:spPr>
+      </p:sp>
+      <p:sp>
+        <p:nvSpPr>
+          <p:cNvPr id="9" name="Text 7"/>
+          <p:cNvSpPr/>
+          <p:nvPr/>
+        </p:nvSpPr>
+        <p:spPr>
+          <a:xfrm>
+            <a:off x="1051560" y="5440680"/>
+            <a:ext cx="10058400" cy="502920"/>
+          </a:xfrm>
+          <a:prstGeom prst="rect">
+            <a:avLst/>
+          </a:prstGeom>
+          <a:noFill/>
+          <a:ln/>
+        </p:spPr>
+        <p:txBody>
+          <a:bodyPr wrap="square" lIns="0" tIns="0" rIns="0" bIns="0" rtlCol="0" anchor="ctr"/>
+          <a:lstStyle/>
+          <a:p>
+            <a:pPr indent="0" marL="0">
+              <a:buNone/>
+            </a:pPr>
+            <a:r>
+              <a:rPr lang="en-US" sz="1250" b="1" dirty="0">
+                <a:solidFill>
+                  <a:srgbClr val="1F5232"/>
+                </a:solidFill>
+                <a:latin typeface="Arial" pitchFamily="34" charset="0"/>
+                <a:ea typeface="Arial" pitchFamily="34" charset="-122"/>
+                <a:cs typeface="Arial" pitchFamily="34" charset="-120"/>
+              </a:rPr>
+              <a:t>Ergebnis: In keinem dieser Fälle ging ein Eintrag verloren – und jede dieser Prüfungen läuft seither vor jeder Auslieferung automatisch mit.</a:t>
+            </a:r>
+            <a:endParaRPr lang="en-US" sz="1250" dirty="0"/>
+          </a:p>
+        </p:txBody>
+      </p:sp>
+    </p:spTree>
+  </p:cSld>
+  <p:clrMapOvr>
+    <a:masterClrMapping/>
+  </p:clrMapOvr>
+</p:sld>
+</file>
+
+<file path=ppt/slides/slide11.xml><?xml version="1.0" encoding="utf-8"?>
+<p:sld xmlns:a="http://schemas.openxmlformats.org/drawingml/2006/main" xmlns:r="http://schemas.openxmlformats.org/officeDocument/2006/relationships" xmlns:p="http://schemas.openxmlformats.org/presentationml/2006/main">
+  <p:cSld name="Slide 11">
     <p:bg>
       <p:bgPr>
         <a:solidFill>
@@ -2849,7 +3555,7 @@
                 <a:ea typeface="Arial" pitchFamily="34" charset="-122"/>
                 <a:cs typeface="Arial" pitchFamily="34" charset="-120"/>
               </a:rPr>
-              <a:t>Geprüfte Härtefälle: beschädigte Datei · falsch gehende Rechneruhr · zwei gleichzeitig offene Fenster · volle Speichergrenze · Laufwerk kurz weg. Quelle: Projekt-Repository (Prüfbericht, README).</a:t>
+              <a:t>Alle Prüfungen laufen automatisch vor jeder Auslieferung – nichts wird von Hand „freigeklickt“. Jede Zahl ist im Projekt nachvollziehbar dokumentiert (Prüfbericht, README).</a:t>
             </a:r>
             <a:endParaRPr lang="en-US" sz="1200" dirty="0"/>
           </a:p>
@@ -2863,9 +3569,9 @@
 </p:sld>
 </file>
 
-<file path=ppt/slides/slide11.xml><?xml version="1.0" encoding="utf-8"?>
+<file path=ppt/slides/slide12.xml><?xml version="1.0" encoding="utf-8"?>
 <p:sld xmlns:a="http://schemas.openxmlformats.org/drawingml/2006/main" xmlns:r="http://schemas.openxmlformats.org/officeDocument/2006/relationships" xmlns:p="http://schemas.openxmlformats.org/presentationml/2006/main">
-  <p:cSld name="Slide 11">
+  <p:cSld name="Slide 12">
     <p:bg>
       <p:bgPr>
         <a:solidFill>
@@ -2974,11 +3680,11 @@
         <p:spPr>
           <a:xfrm>
             <a:off x="822960" y="1737360"/>
-            <a:ext cx="3383280" cy="2286000"/>
+            <a:ext cx="3383280" cy="3977640"/>
           </a:xfrm>
           <a:prstGeom prst="roundRect">
             <a:avLst>
-              <a:gd name="adj" fmla="val 3600"/>
+              <a:gd name="adj" fmla="val 2432"/>
             </a:avLst>
           </a:prstGeom>
           <a:solidFill>
@@ -3007,24 +3713,63 @@
         </p:nvSpPr>
         <p:spPr>
           <a:xfrm>
-            <a:off x="1051560" y="1965960"/>
-            <a:ext cx="2926080" cy="685800"/>
-          </a:xfrm>
-          <a:prstGeom prst="rect">
-            <a:avLst/>
-          </a:prstGeom>
-          <a:noFill/>
-          <a:ln/>
-        </p:spPr>
-        <p:txBody>
-          <a:bodyPr wrap="square" lIns="0" tIns="0" rIns="0" bIns="0" rtlCol="0" anchor="ctr"/>
-          <a:lstStyle/>
-          <a:p>
-            <a:pPr indent="0" marL="0">
-              <a:buNone/>
-            </a:pPr>
-            <a:r>
-              <a:rPr lang="en-US" sz="3300" b="1" dirty="0">
+            <a:off x="1097280" y="1965960"/>
+            <a:ext cx="2834640" cy="320040"/>
+          </a:xfrm>
+          <a:prstGeom prst="rect">
+            <a:avLst/>
+          </a:prstGeom>
+          <a:noFill/>
+          <a:ln/>
+        </p:spPr>
+        <p:txBody>
+          <a:bodyPr wrap="square" lIns="0" tIns="0" rIns="0" bIns="0" rtlCol="0" anchor="ctr"/>
+          <a:lstStyle/>
+          <a:p>
+            <a:pPr indent="0" marL="0">
+              <a:buNone/>
+            </a:pPr>
+            <a:r>
+              <a:rPr lang="en-US" sz="1100" b="1" spc="200" kern="0" dirty="0">
+                <a:solidFill>
+                  <a:srgbClr val="8A9099"/>
+                </a:solidFill>
+                <a:latin typeface="Arial" pitchFamily="34" charset="0"/>
+                <a:ea typeface="Arial" pitchFamily="34" charset="-122"/>
+                <a:cs typeface="Arial" pitchFamily="34" charset="-120"/>
+              </a:rPr>
+              <a:t>KOSTEN BIS HEUTE</a:t>
+            </a:r>
+            <a:endParaRPr lang="en-US" sz="1100" dirty="0"/>
+          </a:p>
+        </p:txBody>
+      </p:sp>
+      <p:sp>
+        <p:nvSpPr>
+          <p:cNvPr id="6" name="Text 4"/>
+          <p:cNvSpPr/>
+          <p:nvPr/>
+        </p:nvSpPr>
+        <p:spPr>
+          <a:xfrm>
+            <a:off x="1097280" y="2286000"/>
+            <a:ext cx="2834640" cy="731520"/>
+          </a:xfrm>
+          <a:prstGeom prst="rect">
+            <a:avLst/>
+          </a:prstGeom>
+          <a:noFill/>
+          <a:ln/>
+        </p:spPr>
+        <p:txBody>
+          <a:bodyPr wrap="square" lIns="0" tIns="0" rIns="0" bIns="0" rtlCol="0" anchor="ctr"/>
+          <a:lstStyle/>
+          <a:p>
+            <a:pPr indent="0" marL="0">
+              <a:buNone/>
+            </a:pPr>
+            <a:r>
+              <a:rPr lang="en-US" sz="3600" b="1" dirty="0">
                 <a:solidFill>
                   <a:srgbClr val="22262B"/>
                 </a:solidFill>
@@ -3032,38 +3777,38 @@
                 <a:ea typeface="Arial" pitchFamily="34" charset="-122"/>
                 <a:cs typeface="Arial" pitchFamily="34" charset="-120"/>
               </a:rPr>
-              <a:t>&lt; 3 000 €</a:t>
-            </a:r>
-            <a:endParaRPr lang="en-US" sz="3300" dirty="0"/>
-          </a:p>
-        </p:txBody>
-      </p:sp>
-      <p:sp>
-        <p:nvSpPr>
-          <p:cNvPr id="6" name="Text 4"/>
-          <p:cNvSpPr/>
-          <p:nvPr/>
-        </p:nvSpPr>
-        <p:spPr>
-          <a:xfrm>
-            <a:off x="1051560" y="2697480"/>
-            <a:ext cx="2926080" cy="365760"/>
-          </a:xfrm>
-          <a:prstGeom prst="rect">
-            <a:avLst/>
-          </a:prstGeom>
-          <a:noFill/>
-          <a:ln/>
-        </p:spPr>
-        <p:txBody>
-          <a:bodyPr wrap="square" lIns="0" tIns="0" rIns="0" bIns="0" rtlCol="0" anchor="ctr"/>
-          <a:lstStyle/>
-          <a:p>
-            <a:pPr indent="0" marL="0">
-              <a:buNone/>
-            </a:pPr>
-            <a:r>
-              <a:rPr lang="en-US" sz="1400" b="1" dirty="0">
+              <a:t>≈ 1 225 €</a:t>
+            </a:r>
+            <a:endParaRPr lang="en-US" sz="3600" dirty="0"/>
+          </a:p>
+        </p:txBody>
+      </p:sp>
+      <p:sp>
+        <p:nvSpPr>
+          <p:cNvPr id="7" name="Text 5"/>
+          <p:cNvSpPr/>
+          <p:nvPr/>
+        </p:nvSpPr>
+        <p:spPr>
+          <a:xfrm>
+            <a:off x="1097280" y="3063240"/>
+            <a:ext cx="2926080" cy="777240"/>
+          </a:xfrm>
+          <a:prstGeom prst="rect">
+            <a:avLst/>
+          </a:prstGeom>
+          <a:noFill/>
+          <a:ln/>
+        </p:spPr>
+        <p:txBody>
+          <a:bodyPr wrap="square" lIns="0" tIns="0" rIns="0" bIns="0" rtlCol="0" anchor="ctr"/>
+          <a:lstStyle/>
+          <a:p>
+            <a:pPr indent="0" marL="0">
+              <a:buNone/>
+            </a:pPr>
+            <a:r>
+              <a:rPr lang="en-US" sz="1200" dirty="0">
                 <a:solidFill>
                   <a:srgbClr val="22262B"/>
                 </a:solidFill>
@@ -3071,22 +3816,39 @@
                 <a:ea typeface="Arial" pitchFamily="34" charset="-122"/>
                 <a:cs typeface="Arial" pitchFamily="34" charset="-120"/>
               </a:rPr>
-              <a:t>Kosten bis heute</a:t>
-            </a:r>
-            <a:endParaRPr lang="en-US" sz="1400" dirty="0"/>
-          </a:p>
-        </p:txBody>
-      </p:sp>
-      <p:sp>
-        <p:nvSpPr>
-          <p:cNvPr id="7" name="Text 5"/>
-          <p:cNvSpPr/>
-          <p:nvPr/>
-        </p:nvSpPr>
-        <p:spPr>
-          <a:xfrm>
-            <a:off x="1051560" y="3108960"/>
-            <a:ext cx="2926080" cy="822960"/>
+              <a:t>ca. 50 h Eigenleistung × 24,50 €/h</a:t>
+            </a:r>
+            <a:endParaRPr lang="en-US" sz="1200" dirty="0"/>
+          </a:p>
+          <a:p>
+            <a:pPr indent="0" marL="0">
+              <a:buNone/>
+            </a:pPr>
+            <a:r>
+              <a:rPr lang="en-US" sz="1200" dirty="0">
+                <a:solidFill>
+                  <a:srgbClr val="22262B"/>
+                </a:solidFill>
+                <a:latin typeface="Arial" pitchFamily="34" charset="0"/>
+                <a:ea typeface="Arial" pitchFamily="34" charset="-122"/>
+                <a:cs typeface="Arial" pitchFamily="34" charset="-120"/>
+              </a:rPr>
+              <a:t>0 € Lizenzkosten – jetzt und künftig</a:t>
+            </a:r>
+            <a:endParaRPr lang="en-US" sz="1200" dirty="0"/>
+          </a:p>
+        </p:txBody>
+      </p:sp>
+      <p:sp>
+        <p:nvSpPr>
+          <p:cNvPr id="8" name="Text 6"/>
+          <p:cNvSpPr/>
+          <p:nvPr/>
+        </p:nvSpPr>
+        <p:spPr>
+          <a:xfrm>
+            <a:off x="1097280" y="4069080"/>
+            <a:ext cx="2926080" cy="1463040"/>
           </a:xfrm>
           <a:prstGeom prst="rect">
             <a:avLst/>
@@ -3110,7 +3872,7 @@
                 <a:ea typeface="Arial" pitchFamily="34" charset="-122"/>
                 <a:cs typeface="Arial" pitchFamily="34" charset="-120"/>
               </a:rPr>
-              <a:t>0 € Lizenz + ca. 50 h Eigenleistung (intern bewertet)</a:t>
+              <a:t>Zum Vergleich: extern entwickeln lassen hieße 40–60 Personentage à ≈ 840 € Marktsatz – rund 40 000 € [1].</a:t>
             </a:r>
             <a:endParaRPr lang="en-US" sz="1100" dirty="0"/>
           </a:p>
@@ -3118,18 +3880,18 @@
       </p:sp>
       <p:sp>
         <p:nvSpPr>
-          <p:cNvPr id="8" name="Shape 6"/>
-          <p:cNvSpPr/>
-          <p:nvPr/>
-        </p:nvSpPr>
-        <p:spPr>
-          <a:xfrm>
-            <a:off x="4480560" y="1737360"/>
-            <a:ext cx="3383280" cy="2286000"/>
+          <p:cNvPr id="9" name="Shape 7"/>
+          <p:cNvSpPr/>
+          <p:nvPr/>
+        </p:nvSpPr>
+        <p:spPr>
+          <a:xfrm>
+            <a:off x="4526280" y="1737360"/>
+            <a:ext cx="6858000" cy="3977640"/>
           </a:xfrm>
           <a:prstGeom prst="roundRect">
             <a:avLst>
-              <a:gd name="adj" fmla="val 3600"/>
+              <a:gd name="adj" fmla="val 2069"/>
             </a:avLst>
           </a:prstGeom>
           <a:solidFill>
@@ -3152,30 +3914,225 @@
       </p:sp>
       <p:sp>
         <p:nvSpPr>
-          <p:cNvPr id="9" name="Text 7"/>
-          <p:cNvSpPr/>
-          <p:nvPr/>
-        </p:nvSpPr>
-        <p:spPr>
-          <a:xfrm>
-            <a:off x="4709160" y="1965960"/>
-            <a:ext cx="2926080" cy="685800"/>
-          </a:xfrm>
-          <a:prstGeom prst="rect">
-            <a:avLst/>
-          </a:prstGeom>
-          <a:noFill/>
-          <a:ln/>
-        </p:spPr>
-        <p:txBody>
-          <a:bodyPr wrap="square" lIns="0" tIns="0" rIns="0" bIns="0" rtlCol="0" anchor="ctr"/>
-          <a:lstStyle/>
-          <a:p>
-            <a:pPr indent="0" marL="0">
-              <a:buNone/>
-            </a:pPr>
-            <a:r>
-              <a:rPr lang="en-US" sz="3300" b="1" dirty="0">
+          <p:cNvPr id="10" name="Text 8"/>
+          <p:cNvSpPr/>
+          <p:nvPr/>
+        </p:nvSpPr>
+        <p:spPr>
+          <a:xfrm>
+            <a:off x="4800600" y="1965960"/>
+            <a:ext cx="4206240" cy="320040"/>
+          </a:xfrm>
+          <a:prstGeom prst="rect">
+            <a:avLst/>
+          </a:prstGeom>
+          <a:noFill/>
+          <a:ln/>
+        </p:spPr>
+        <p:txBody>
+          <a:bodyPr wrap="square" lIns="0" tIns="0" rIns="0" bIns="0" rtlCol="0" anchor="ctr"/>
+          <a:lstStyle/>
+          <a:p>
+            <a:pPr indent="0" marL="0">
+              <a:buNone/>
+            </a:pPr>
+            <a:r>
+              <a:rPr lang="en-US" sz="1100" b="1" spc="200" kern="0" dirty="0">
+                <a:solidFill>
+                  <a:srgbClr val="8A9099"/>
+                </a:solidFill>
+                <a:latin typeface="Arial" pitchFamily="34" charset="0"/>
+                <a:ea typeface="Arial" pitchFamily="34" charset="-122"/>
+                <a:cs typeface="Arial" pitchFamily="34" charset="-120"/>
+              </a:rPr>
+              <a:t>ERSPARNIS – SO GERECHNET</a:t>
+            </a:r>
+            <a:endParaRPr lang="en-US" sz="1100" dirty="0"/>
+          </a:p>
+        </p:txBody>
+      </p:sp>
+      <p:sp>
+        <p:nvSpPr>
+          <p:cNvPr id="11" name="Text 9"/>
+          <p:cNvSpPr/>
+          <p:nvPr/>
+        </p:nvSpPr>
+        <p:spPr>
+          <a:xfrm>
+            <a:off x="8229600" y="1965960"/>
+            <a:ext cx="1463040" cy="320040"/>
+          </a:xfrm>
+          <a:prstGeom prst="rect">
+            <a:avLst/>
+          </a:prstGeom>
+          <a:noFill/>
+          <a:ln/>
+        </p:spPr>
+        <p:txBody>
+          <a:bodyPr wrap="square" lIns="0" tIns="0" rIns="0" bIns="0" rtlCol="0" anchor="ctr"/>
+          <a:lstStyle/>
+          <a:p>
+            <a:pPr algn="r" indent="0" marL="0">
+              <a:buNone/>
+            </a:pPr>
+            <a:r>
+              <a:rPr lang="en-US" sz="1250" b="1" dirty="0">
+                <a:solidFill>
+                  <a:srgbClr val="22262B"/>
+                </a:solidFill>
+                <a:latin typeface="Arial" pitchFamily="34" charset="0"/>
+                <a:ea typeface="Arial" pitchFamily="34" charset="-122"/>
+                <a:cs typeface="Arial" pitchFamily="34" charset="-120"/>
+              </a:rPr>
+              <a:t>Jahr 1</a:t>
+            </a:r>
+            <a:endParaRPr lang="en-US" sz="1250" dirty="0"/>
+          </a:p>
+        </p:txBody>
+      </p:sp>
+      <p:sp>
+        <p:nvSpPr>
+          <p:cNvPr id="12" name="Text 10"/>
+          <p:cNvSpPr/>
+          <p:nvPr/>
+        </p:nvSpPr>
+        <p:spPr>
+          <a:xfrm>
+            <a:off x="9784080" y="1965960"/>
+            <a:ext cx="1371600" cy="320040"/>
+          </a:xfrm>
+          <a:prstGeom prst="rect">
+            <a:avLst/>
+          </a:prstGeom>
+          <a:noFill/>
+          <a:ln/>
+        </p:spPr>
+        <p:txBody>
+          <a:bodyPr wrap="square" lIns="0" tIns="0" rIns="0" bIns="0" rtlCol="0" anchor="ctr"/>
+          <a:lstStyle/>
+          <a:p>
+            <a:pPr algn="r" indent="0" marL="0">
+              <a:buNone/>
+            </a:pPr>
+            <a:r>
+              <a:rPr lang="en-US" sz="1250" b="1" dirty="0">
+                <a:solidFill>
+                  <a:srgbClr val="22262B"/>
+                </a:solidFill>
+                <a:latin typeface="Arial" pitchFamily="34" charset="0"/>
+                <a:ea typeface="Arial" pitchFamily="34" charset="-122"/>
+                <a:cs typeface="Arial" pitchFamily="34" charset="-120"/>
+              </a:rPr>
+              <a:t>ab Jahr 2</a:t>
+            </a:r>
+            <a:endParaRPr lang="en-US" sz="1250" dirty="0"/>
+          </a:p>
+        </p:txBody>
+      </p:sp>
+      <p:sp>
+        <p:nvSpPr>
+          <p:cNvPr id="13" name="Text 11"/>
+          <p:cNvSpPr/>
+          <p:nvPr/>
+        </p:nvSpPr>
+        <p:spPr>
+          <a:xfrm>
+            <a:off x="4800600" y="2423160"/>
+            <a:ext cx="3383280" cy="365760"/>
+          </a:xfrm>
+          <a:prstGeom prst="rect">
+            <a:avLst/>
+          </a:prstGeom>
+          <a:noFill/>
+          <a:ln/>
+        </p:spPr>
+        <p:txBody>
+          <a:bodyPr wrap="square" lIns="0" tIns="0" rIns="0" bIns="0" rtlCol="0" anchor="ctr"/>
+          <a:lstStyle/>
+          <a:p>
+            <a:pPr indent="0" marL="0">
+              <a:buNone/>
+            </a:pPr>
+            <a:r>
+              <a:rPr lang="en-US" sz="1350" b="1" dirty="0">
+                <a:solidFill>
+                  <a:srgbClr val="22262B"/>
+                </a:solidFill>
+                <a:latin typeface="Arial" pitchFamily="34" charset="0"/>
+                <a:ea typeface="Arial" pitchFamily="34" charset="-122"/>
+                <a:cs typeface="Arial" pitchFamily="34" charset="-120"/>
+              </a:rPr>
+              <a:t>Kauf-Software vermieden (CMMS)</a:t>
+            </a:r>
+            <a:endParaRPr lang="en-US" sz="1350" dirty="0"/>
+          </a:p>
+        </p:txBody>
+      </p:sp>
+      <p:sp>
+        <p:nvSpPr>
+          <p:cNvPr id="14" name="Text 12"/>
+          <p:cNvSpPr/>
+          <p:nvPr/>
+        </p:nvSpPr>
+        <p:spPr>
+          <a:xfrm>
+            <a:off x="4800600" y="2770632"/>
+            <a:ext cx="3383280" cy="777240"/>
+          </a:xfrm>
+          <a:prstGeom prst="rect">
+            <a:avLst/>
+          </a:prstGeom>
+          <a:noFill/>
+          <a:ln/>
+        </p:spPr>
+        <p:txBody>
+          <a:bodyPr wrap="square" lIns="0" tIns="0" rIns="0" bIns="0" rtlCol="0" anchor="ctr"/>
+          <a:lstStyle/>
+          <a:p>
+            <a:pPr indent="0" marL="0">
+              <a:buNone/>
+            </a:pPr>
+            <a:r>
+              <a:rPr lang="en-US" sz="1050" dirty="0">
+                <a:solidFill>
+                  <a:srgbClr val="8A9099"/>
+                </a:solidFill>
+                <a:latin typeface="Arial" pitchFamily="34" charset="0"/>
+                <a:ea typeface="Arial" pitchFamily="34" charset="-122"/>
+                <a:cs typeface="Arial" pitchFamily="34" charset="-120"/>
+              </a:rPr>
+              <a:t>4 200 € Jahreslizenz + 8 000 € Einführung – bewusst das untere Marktende [2][3]</a:t>
+            </a:r>
+            <a:endParaRPr lang="en-US" sz="1050" dirty="0"/>
+          </a:p>
+        </p:txBody>
+      </p:sp>
+      <p:sp>
+        <p:nvSpPr>
+          <p:cNvPr id="15" name="Text 13"/>
+          <p:cNvSpPr/>
+          <p:nvPr/>
+        </p:nvSpPr>
+        <p:spPr>
+          <a:xfrm>
+            <a:off x="8229600" y="2423160"/>
+            <a:ext cx="1463040" cy="365760"/>
+          </a:xfrm>
+          <a:prstGeom prst="rect">
+            <a:avLst/>
+          </a:prstGeom>
+          <a:noFill/>
+          <a:ln/>
+        </p:spPr>
+        <p:txBody>
+          <a:bodyPr wrap="square" lIns="0" tIns="0" rIns="0" bIns="0" rtlCol="0" anchor="ctr"/>
+          <a:lstStyle/>
+          <a:p>
+            <a:pPr algn="r" indent="0" marL="0">
+              <a:buNone/>
+            </a:pPr>
+            <a:r>
+              <a:rPr lang="en-US" sz="1400" b="1" dirty="0">
                 <a:solidFill>
                   <a:srgbClr val="2F6690"/>
                 </a:solidFill>
@@ -3183,46 +4140,163 @@
                 <a:ea typeface="Arial" pitchFamily="34" charset="-122"/>
                 <a:cs typeface="Arial" pitchFamily="34" charset="-120"/>
               </a:rPr>
-              <a:t>≈ 40 000 €</a:t>
-            </a:r>
-            <a:endParaRPr lang="en-US" sz="3300" dirty="0"/>
-          </a:p>
-        </p:txBody>
-      </p:sp>
-      <p:sp>
-        <p:nvSpPr>
-          <p:cNvPr id="10" name="Text 8"/>
-          <p:cNvSpPr/>
-          <p:nvPr/>
-        </p:nvSpPr>
-        <p:spPr>
-          <a:xfrm>
-            <a:off x="4709160" y="2697480"/>
-            <a:ext cx="2926080" cy="365760"/>
-          </a:xfrm>
-          <a:prstGeom prst="rect">
-            <a:avLst/>
-          </a:prstGeom>
-          <a:noFill/>
-          <a:ln/>
-        </p:spPr>
-        <p:txBody>
-          <a:bodyPr wrap="square" lIns="0" tIns="0" rIns="0" bIns="0" rtlCol="0" anchor="ctr"/>
-          <a:lstStyle/>
-          <a:p>
-            <a:pPr indent="0" marL="0">
+              <a:t>≈ 12 000 €</a:t>
+            </a:r>
+            <a:endParaRPr lang="en-US" sz="1400" dirty="0"/>
+          </a:p>
+        </p:txBody>
+      </p:sp>
+      <p:sp>
+        <p:nvSpPr>
+          <p:cNvPr id="16" name="Text 14"/>
+          <p:cNvSpPr/>
+          <p:nvPr/>
+        </p:nvSpPr>
+        <p:spPr>
+          <a:xfrm>
+            <a:off x="9784080" y="2423160"/>
+            <a:ext cx="1371600" cy="365760"/>
+          </a:xfrm>
+          <a:prstGeom prst="rect">
+            <a:avLst/>
+          </a:prstGeom>
+          <a:noFill/>
+          <a:ln/>
+        </p:spPr>
+        <p:txBody>
+          <a:bodyPr wrap="square" lIns="0" tIns="0" rIns="0" bIns="0" rtlCol="0" anchor="ctr"/>
+          <a:lstStyle/>
+          <a:p>
+            <a:pPr algn="r" indent="0" marL="0">
               <a:buNone/>
             </a:pPr>
             <a:r>
               <a:rPr lang="en-US" sz="1400" b="1" dirty="0">
                 <a:solidFill>
+                  <a:srgbClr val="2F6690"/>
+                </a:solidFill>
+                <a:latin typeface="Arial" pitchFamily="34" charset="0"/>
+                <a:ea typeface="Arial" pitchFamily="34" charset="-122"/>
+                <a:cs typeface="Arial" pitchFamily="34" charset="-120"/>
+              </a:rPr>
+              <a:t>≈ 4 200 €</a:t>
+            </a:r>
+            <a:endParaRPr lang="en-US" sz="1400" dirty="0"/>
+          </a:p>
+        </p:txBody>
+      </p:sp>
+      <p:sp>
+        <p:nvSpPr>
+          <p:cNvPr id="17" name="Text 15"/>
+          <p:cNvSpPr/>
+          <p:nvPr/>
+        </p:nvSpPr>
+        <p:spPr>
+          <a:xfrm>
+            <a:off x="4800600" y="3566160"/>
+            <a:ext cx="3383280" cy="365760"/>
+          </a:xfrm>
+          <a:prstGeom prst="rect">
+            <a:avLst/>
+          </a:prstGeom>
+          <a:noFill/>
+          <a:ln/>
+        </p:spPr>
+        <p:txBody>
+          <a:bodyPr wrap="square" lIns="0" tIns="0" rIns="0" bIns="0" rtlCol="0" anchor="ctr"/>
+          <a:lstStyle/>
+          <a:p>
+            <a:pPr indent="0" marL="0">
+              <a:buNone/>
+            </a:pPr>
+            <a:r>
+              <a:rPr lang="en-US" sz="1350" b="1" dirty="0">
+                <a:solidFill>
                   <a:srgbClr val="22262B"/>
                 </a:solidFill>
                 <a:latin typeface="Arial" pitchFamily="34" charset="0"/>
                 <a:ea typeface="Arial" pitchFamily="34" charset="-122"/>
                 <a:cs typeface="Arial" pitchFamily="34" charset="-120"/>
               </a:rPr>
-              <a:t>Ersatzwert der Entwicklung</a:t>
+              <a:t>Zeitgewinn im Alltag</a:t>
+            </a:r>
+            <a:endParaRPr lang="en-US" sz="1350" dirty="0"/>
+          </a:p>
+        </p:txBody>
+      </p:sp>
+      <p:sp>
+        <p:nvSpPr>
+          <p:cNvPr id="18" name="Text 16"/>
+          <p:cNvSpPr/>
+          <p:nvPr/>
+        </p:nvSpPr>
+        <p:spPr>
+          <a:xfrm>
+            <a:off x="4800600" y="3913632"/>
+            <a:ext cx="3383280" cy="777240"/>
+          </a:xfrm>
+          <a:prstGeom prst="rect">
+            <a:avLst/>
+          </a:prstGeom>
+          <a:noFill/>
+          <a:ln/>
+        </p:spPr>
+        <p:txBody>
+          <a:bodyPr wrap="square" lIns="0" tIns="0" rIns="0" bIns="0" rtlCol="0" anchor="ctr"/>
+          <a:lstStyle/>
+          <a:p>
+            <a:pPr indent="0" marL="0">
+              <a:buNone/>
+            </a:pPr>
+            <a:r>
+              <a:rPr lang="en-US" sz="1050" dirty="0">
+                <a:solidFill>
+                  <a:srgbClr val="8A9099"/>
+                </a:solidFill>
+                <a:latin typeface="Arial" pitchFamily="34" charset="0"/>
+                <a:ea typeface="Arial" pitchFamily="34" charset="-122"/>
+                <a:cs typeface="Arial" pitchFamily="34" charset="-120"/>
+              </a:rPr>
+              <a:t>5–10 min je Person und Arbeitstag, 9 Personen, 45 €/h – Annahme, wird nach 3 Monaten nachgemessen</a:t>
+            </a:r>
+            <a:endParaRPr lang="en-US" sz="1050" dirty="0"/>
+          </a:p>
+        </p:txBody>
+      </p:sp>
+      <p:sp>
+        <p:nvSpPr>
+          <p:cNvPr id="19" name="Text 17"/>
+          <p:cNvSpPr/>
+          <p:nvPr/>
+        </p:nvSpPr>
+        <p:spPr>
+          <a:xfrm>
+            <a:off x="8229600" y="3566160"/>
+            <a:ext cx="1463040" cy="365760"/>
+          </a:xfrm>
+          <a:prstGeom prst="rect">
+            <a:avLst/>
+          </a:prstGeom>
+          <a:noFill/>
+          <a:ln/>
+        </p:spPr>
+        <p:txBody>
+          <a:bodyPr wrap="square" lIns="0" tIns="0" rIns="0" bIns="0" rtlCol="0" anchor="ctr"/>
+          <a:lstStyle/>
+          <a:p>
+            <a:pPr algn="r" indent="0" marL="0">
+              <a:buNone/>
+            </a:pPr>
+            <a:r>
+              <a:rPr lang="en-US" sz="1400" b="1" dirty="0">
+                <a:solidFill>
+                  <a:srgbClr val="2F6690"/>
+                </a:solidFill>
+                <a:latin typeface="Arial" pitchFamily="34" charset="0"/>
+                <a:ea typeface="Arial" pitchFamily="34" charset="-122"/>
+                <a:cs typeface="Arial" pitchFamily="34" charset="-120"/>
+              </a:rPr>
+              <a:t>≈ 7 500 €</a:t>
             </a:r>
             <a:endParaRPr lang="en-US" sz="1400" dirty="0"/>
           </a:p>
@@ -3230,103 +4304,131 @@
       </p:sp>
       <p:sp>
         <p:nvSpPr>
-          <p:cNvPr id="11" name="Text 9"/>
-          <p:cNvSpPr/>
-          <p:nvPr/>
-        </p:nvSpPr>
-        <p:spPr>
-          <a:xfrm>
-            <a:off x="4709160" y="3108960"/>
-            <a:ext cx="2926080" cy="822960"/>
-          </a:xfrm>
-          <a:prstGeom prst="rect">
-            <a:avLst/>
-          </a:prstGeom>
-          <a:noFill/>
-          <a:ln/>
-        </p:spPr>
-        <p:txBody>
-          <a:bodyPr wrap="square" lIns="0" tIns="0" rIns="0" bIns="0" rtlCol="0" anchor="ctr"/>
-          <a:lstStyle/>
-          <a:p>
-            <a:pPr indent="0" marL="0">
-              <a:buNone/>
-            </a:pPr>
-            <a:r>
-              <a:rPr lang="en-US" sz="1100" dirty="0">
-                <a:solidFill>
-                  <a:srgbClr val="8A9099"/>
-                </a:solidFill>
-                <a:latin typeface="Arial" pitchFamily="34" charset="0"/>
-                <a:ea typeface="Arial" pitchFamily="34" charset="-122"/>
-                <a:cs typeface="Arial" pitchFamily="34" charset="-120"/>
-              </a:rPr>
-              <a:t>40–60 Personentage à ≈ 840 € Marktsatz für IT-Entwicklung [1]</a:t>
-            </a:r>
-            <a:endParaRPr lang="en-US" sz="1100" dirty="0"/>
-          </a:p>
-        </p:txBody>
-      </p:sp>
-      <p:sp>
-        <p:nvSpPr>
-          <p:cNvPr id="12" name="Shape 10"/>
-          <p:cNvSpPr/>
-          <p:nvPr/>
-        </p:nvSpPr>
-        <p:spPr>
-          <a:xfrm>
-            <a:off x="8138160" y="1737360"/>
-            <a:ext cx="3383280" cy="2286000"/>
-          </a:xfrm>
-          <a:prstGeom prst="roundRect">
-            <a:avLst>
-              <a:gd name="adj" fmla="val 3600"/>
-            </a:avLst>
-          </a:prstGeom>
-          <a:solidFill>
-            <a:srgbClr val="F5F6F7"/>
-          </a:solidFill>
+          <p:cNvPr id="20" name="Text 18"/>
+          <p:cNvSpPr/>
+          <p:nvPr/>
+        </p:nvSpPr>
+        <p:spPr>
+          <a:xfrm>
+            <a:off x="9784080" y="3566160"/>
+            <a:ext cx="1371600" cy="365760"/>
+          </a:xfrm>
+          <a:prstGeom prst="rect">
+            <a:avLst/>
+          </a:prstGeom>
+          <a:noFill/>
+          <a:ln/>
+        </p:spPr>
+        <p:txBody>
+          <a:bodyPr wrap="square" lIns="0" tIns="0" rIns="0" bIns="0" rtlCol="0" anchor="ctr"/>
+          <a:lstStyle/>
+          <a:p>
+            <a:pPr algn="r" indent="0" marL="0">
+              <a:buNone/>
+            </a:pPr>
+            <a:r>
+              <a:rPr lang="en-US" sz="1400" b="1" dirty="0">
+                <a:solidFill>
+                  <a:srgbClr val="2F6690"/>
+                </a:solidFill>
+                <a:latin typeface="Arial" pitchFamily="34" charset="0"/>
+                <a:ea typeface="Arial" pitchFamily="34" charset="-122"/>
+                <a:cs typeface="Arial" pitchFamily="34" charset="-120"/>
+              </a:rPr>
+              <a:t>≈ 7 500 €</a:t>
+            </a:r>
+            <a:endParaRPr lang="en-US" sz="1400" dirty="0"/>
+          </a:p>
+        </p:txBody>
+      </p:sp>
+      <p:sp>
+        <p:nvSpPr>
+          <p:cNvPr id="21" name="Shape 19"/>
+          <p:cNvSpPr/>
+          <p:nvPr/>
+        </p:nvSpPr>
+        <p:spPr>
+          <a:xfrm>
+            <a:off x="4800600" y="4754880"/>
+            <a:ext cx="6355080" cy="0"/>
+          </a:xfrm>
+          <a:prstGeom prst="line">
+            <a:avLst/>
+          </a:prstGeom>
+          <a:noFill/>
           <a:ln w="12700">
             <a:solidFill>
-              <a:srgbClr val="E2E4E7"/>
+              <a:srgbClr val="C9CDD2"/>
             </a:solidFill>
             <a:prstDash val="solid"/>
           </a:ln>
-          <a:effectLst>
-            <a:outerShdw sx="100000" sy="100000" kx="0" ky="0" algn="bl" rotWithShape="0" blurRad="101600" dist="38100" dir="5400000">
-              <a:srgbClr val="3A3F45">
-                <a:alpha val="35000"/>
-              </a:srgbClr>
-            </a:outerShdw>
-          </a:effectLst>
-        </p:spPr>
-      </p:sp>
-      <p:sp>
-        <p:nvSpPr>
-          <p:cNvPr id="13" name="Text 11"/>
-          <p:cNvSpPr/>
-          <p:nvPr/>
-        </p:nvSpPr>
-        <p:spPr>
-          <a:xfrm>
-            <a:off x="8366760" y="1965960"/>
-            <a:ext cx="2926080" cy="685800"/>
-          </a:xfrm>
-          <a:prstGeom prst="rect">
-            <a:avLst/>
-          </a:prstGeom>
-          <a:noFill/>
-          <a:ln/>
-        </p:spPr>
-        <p:txBody>
-          <a:bodyPr wrap="square" lIns="0" tIns="0" rIns="0" bIns="0" rtlCol="0" anchor="ctr"/>
-          <a:lstStyle/>
-          <a:p>
-            <a:pPr indent="0" marL="0">
-              <a:buNone/>
-            </a:pPr>
-            <a:r>
-              <a:rPr lang="en-US" sz="3300" b="1" dirty="0">
+        </p:spPr>
+      </p:sp>
+      <p:sp>
+        <p:nvSpPr>
+          <p:cNvPr id="22" name="Text 20"/>
+          <p:cNvSpPr/>
+          <p:nvPr/>
+        </p:nvSpPr>
+        <p:spPr>
+          <a:xfrm>
+            <a:off x="4800600" y="4937760"/>
+            <a:ext cx="3200400" cy="411480"/>
+          </a:xfrm>
+          <a:prstGeom prst="rect">
+            <a:avLst/>
+          </a:prstGeom>
+          <a:noFill/>
+          <a:ln/>
+        </p:spPr>
+        <p:txBody>
+          <a:bodyPr wrap="square" lIns="0" tIns="0" rIns="0" bIns="0" rtlCol="0" anchor="ctr"/>
+          <a:lstStyle/>
+          <a:p>
+            <a:pPr indent="0" marL="0">
+              <a:buNone/>
+            </a:pPr>
+            <a:r>
+              <a:rPr lang="en-US" sz="1450" b="1" dirty="0">
+                <a:solidFill>
+                  <a:srgbClr val="22262B"/>
+                </a:solidFill>
+                <a:latin typeface="Arial" pitchFamily="34" charset="0"/>
+                <a:ea typeface="Arial" pitchFamily="34" charset="-122"/>
+                <a:cs typeface="Arial" pitchFamily="34" charset="-120"/>
+              </a:rPr>
+              <a:t>Zusammen</a:t>
+            </a:r>
+            <a:endParaRPr lang="en-US" sz="1450" dirty="0"/>
+          </a:p>
+        </p:txBody>
+      </p:sp>
+      <p:sp>
+        <p:nvSpPr>
+          <p:cNvPr id="23" name="Text 21"/>
+          <p:cNvSpPr/>
+          <p:nvPr/>
+        </p:nvSpPr>
+        <p:spPr>
+          <a:xfrm>
+            <a:off x="7863840" y="4873752"/>
+            <a:ext cx="1828800" cy="502920"/>
+          </a:xfrm>
+          <a:prstGeom prst="rect">
+            <a:avLst/>
+          </a:prstGeom>
+          <a:noFill/>
+          <a:ln/>
+        </p:spPr>
+        <p:txBody>
+          <a:bodyPr wrap="square" lIns="0" tIns="0" rIns="0" bIns="0" rtlCol="0" anchor="ctr"/>
+          <a:lstStyle/>
+          <a:p>
+            <a:pPr algn="r" indent="0" marL="0">
+              <a:buNone/>
+            </a:pPr>
+            <a:r>
+              <a:rPr lang="en-US" sz="1700" b="1" dirty="0">
                 <a:solidFill>
                   <a:srgbClr val="2F7D4F"/>
                 </a:solidFill>
@@ -3336,75 +4438,75 @@
               </a:rPr>
               <a:t>≈ 20 000 €</a:t>
             </a:r>
-            <a:endParaRPr lang="en-US" sz="3300" dirty="0"/>
-          </a:p>
-        </p:txBody>
-      </p:sp>
-      <p:sp>
-        <p:nvSpPr>
-          <p:cNvPr id="14" name="Text 12"/>
-          <p:cNvSpPr/>
-          <p:nvPr/>
-        </p:nvSpPr>
-        <p:spPr>
-          <a:xfrm>
-            <a:off x="8366760" y="2697480"/>
-            <a:ext cx="2926080" cy="365760"/>
-          </a:xfrm>
-          <a:prstGeom prst="rect">
-            <a:avLst/>
-          </a:prstGeom>
-          <a:noFill/>
-          <a:ln/>
-        </p:spPr>
-        <p:txBody>
-          <a:bodyPr wrap="square" lIns="0" tIns="0" rIns="0" bIns="0" rtlCol="0" anchor="ctr"/>
-          <a:lstStyle/>
-          <a:p>
-            <a:pPr indent="0" marL="0">
-              <a:buNone/>
-            </a:pPr>
-            <a:r>
-              <a:rPr lang="en-US" sz="1400" b="1" dirty="0">
-                <a:solidFill>
-                  <a:srgbClr val="22262B"/>
-                </a:solidFill>
-                <a:latin typeface="Arial" pitchFamily="34" charset="0"/>
-                <a:ea typeface="Arial" pitchFamily="34" charset="-122"/>
-                <a:cs typeface="Arial" pitchFamily="34" charset="-120"/>
-              </a:rPr>
-              <a:t>Ersparnis im ersten Jahr</a:t>
-            </a:r>
-            <a:endParaRPr lang="en-US" sz="1400" dirty="0"/>
-          </a:p>
-        </p:txBody>
-      </p:sp>
-      <p:sp>
-        <p:nvSpPr>
-          <p:cNvPr id="15" name="Text 13"/>
-          <p:cNvSpPr/>
-          <p:nvPr/>
-        </p:nvSpPr>
-        <p:spPr>
-          <a:xfrm>
-            <a:off x="8366760" y="3108960"/>
-            <a:ext cx="2926080" cy="822960"/>
-          </a:xfrm>
-          <a:prstGeom prst="rect">
-            <a:avLst/>
-          </a:prstGeom>
-          <a:noFill/>
-          <a:ln/>
-        </p:spPr>
-        <p:txBody>
-          <a:bodyPr wrap="square" lIns="0" tIns="0" rIns="0" bIns="0" rtlCol="0" anchor="ctr"/>
-          <a:lstStyle/>
-          <a:p>
-            <a:pPr indent="0" marL="0">
-              <a:buNone/>
-            </a:pPr>
-            <a:r>
-              <a:rPr lang="en-US" sz="1100" dirty="0">
+            <a:endParaRPr lang="en-US" sz="1700" dirty="0"/>
+          </a:p>
+        </p:txBody>
+      </p:sp>
+      <p:sp>
+        <p:nvSpPr>
+          <p:cNvPr id="24" name="Text 22"/>
+          <p:cNvSpPr/>
+          <p:nvPr/>
+        </p:nvSpPr>
+        <p:spPr>
+          <a:xfrm>
+            <a:off x="9464040" y="4873752"/>
+            <a:ext cx="1691640" cy="502920"/>
+          </a:xfrm>
+          <a:prstGeom prst="rect">
+            <a:avLst/>
+          </a:prstGeom>
+          <a:noFill/>
+          <a:ln/>
+        </p:spPr>
+        <p:txBody>
+          <a:bodyPr wrap="square" lIns="0" tIns="0" rIns="0" bIns="0" rtlCol="0" anchor="ctr"/>
+          <a:lstStyle/>
+          <a:p>
+            <a:pPr algn="r" indent="0" marL="0">
+              <a:buNone/>
+            </a:pPr>
+            <a:r>
+              <a:rPr lang="en-US" sz="1350" b="1" dirty="0">
+                <a:solidFill>
+                  <a:srgbClr val="2F7D4F"/>
+                </a:solidFill>
+                <a:latin typeface="Arial" pitchFamily="34" charset="0"/>
+                <a:ea typeface="Arial" pitchFamily="34" charset="-122"/>
+                <a:cs typeface="Arial" pitchFamily="34" charset="-120"/>
+              </a:rPr>
+              <a:t>≈ 12 000 €/Jahr</a:t>
+            </a:r>
+            <a:endParaRPr lang="en-US" sz="1350" dirty="0"/>
+          </a:p>
+        </p:txBody>
+      </p:sp>
+      <p:sp>
+        <p:nvSpPr>
+          <p:cNvPr id="25" name="Text 23"/>
+          <p:cNvSpPr/>
+          <p:nvPr/>
+        </p:nvSpPr>
+        <p:spPr>
+          <a:xfrm>
+            <a:off x="822960" y="5943600"/>
+            <a:ext cx="10607040" cy="685800"/>
+          </a:xfrm>
+          <a:prstGeom prst="rect">
+            <a:avLst/>
+          </a:prstGeom>
+          <a:noFill/>
+          <a:ln/>
+        </p:spPr>
+        <p:txBody>
+          <a:bodyPr wrap="square" lIns="0" tIns="0" rIns="0" bIns="0" rtlCol="0" anchor="ctr"/>
+          <a:lstStyle/>
+          <a:p>
+            <a:pPr indent="0" marL="0">
+              <a:buNone/>
+            </a:pPr>
+            <a:r>
+              <a:rPr lang="en-US" sz="1050" i="1" dirty="0">
                 <a:solidFill>
                   <a:srgbClr val="8A9099"/>
                 </a:solidFill>
@@ -3412,132 +4514,7 @@
                 <a:ea typeface="Arial" pitchFamily="34" charset="-122"/>
                 <a:cs typeface="Arial" pitchFamily="34" charset="-120"/>
               </a:rPr>
-              <a:t>vermiedene Kauf-Software [2][3] + konservativ gerechneter Zeitgewinn</a:t>
-            </a:r>
-            <a:endParaRPr lang="en-US" sz="1100" dirty="0"/>
-          </a:p>
-        </p:txBody>
-      </p:sp>
-      <p:sp>
-        <p:nvSpPr>
-          <p:cNvPr id="16" name="Shape 14"/>
-          <p:cNvSpPr/>
-          <p:nvPr/>
-        </p:nvSpPr>
-        <p:spPr>
-          <a:xfrm>
-            <a:off x="822960" y="4343400"/>
-            <a:ext cx="10698480" cy="1417320"/>
-          </a:xfrm>
-          <a:prstGeom prst="roundRect">
-            <a:avLst>
-              <a:gd name="adj" fmla="val 5161"/>
-            </a:avLst>
-          </a:prstGeom>
-          <a:solidFill>
-            <a:srgbClr val="FBF3DA"/>
-          </a:solidFill>
-          <a:ln w="12700">
-            <a:solidFill>
-              <a:srgbClr val="E8B33C"/>
-            </a:solidFill>
-            <a:prstDash val="solid"/>
-          </a:ln>
-        </p:spPr>
-      </p:sp>
-      <p:sp>
-        <p:nvSpPr>
-          <p:cNvPr id="17" name="Text 15"/>
-          <p:cNvSpPr/>
-          <p:nvPr/>
-        </p:nvSpPr>
-        <p:spPr>
-          <a:xfrm>
-            <a:off x="1097280" y="4526280"/>
-            <a:ext cx="10149840" cy="1097280"/>
-          </a:xfrm>
-          <a:prstGeom prst="rect">
-            <a:avLst/>
-          </a:prstGeom>
-          <a:noFill/>
-          <a:ln/>
-        </p:spPr>
-        <p:txBody>
-          <a:bodyPr wrap="square" lIns="0" tIns="0" rIns="0" bIns="0" rtlCol="0" anchor="t"/>
-          <a:lstStyle/>
-          <a:p>
-            <a:pPr indent="0" marL="0">
-              <a:spcAft>
-                <a:spcPts val="500"/>
-              </a:spcAft>
-              <a:buNone/>
-            </a:pPr>
-            <a:r>
-              <a:rPr lang="en-US" sz="1350" b="1" dirty="0">
-                <a:solidFill>
-                  <a:srgbClr val="7A5A00"/>
-                </a:solidFill>
-                <a:latin typeface="Arial" pitchFamily="34" charset="0"/>
-                <a:ea typeface="Arial" pitchFamily="34" charset="-122"/>
-                <a:cs typeface="Arial" pitchFamily="34" charset="-120"/>
-              </a:rPr>
-              <a:t>Ehrlich dazugesagt – was es bewusst NICHT kann:  </a:t>
-            </a:r>
-            <a:endParaRPr lang="en-US" sz="1350" dirty="0"/>
-          </a:p>
-          <a:p>
-            <a:pPr indent="0" marL="0">
-              <a:buNone/>
-            </a:pPr>
-            <a:r>
-              <a:rPr lang="en-US" sz="1250" dirty="0">
-                <a:solidFill>
-                  <a:srgbClr val="22262B"/>
-                </a:solidFill>
-                <a:latin typeface="Arial" pitchFamily="34" charset="0"/>
-                <a:ea typeface="Arial" pitchFamily="34" charset="-122"/>
-                <a:cs typeface="Arial" pitchFamily="34" charset="-120"/>
-              </a:rPr>
-              <a:t>Ersatzteil-Lager mit Bestellwesen · mobile Erfassung per QR-Code · Mehr-Standort-Betrieb · revisionssicherer Audit-Trail. Wird eine dieser Anforderungen real, stellen wir die Frage nach einer Kauf-Software neu – die offenen Daten machen einen Umstieg jederzeit verlustfrei möglich.</a:t>
-            </a:r>
-            <a:endParaRPr lang="en-US" sz="1350" dirty="0"/>
-          </a:p>
-        </p:txBody>
-      </p:sp>
-      <p:sp>
-        <p:nvSpPr>
-          <p:cNvPr id="18" name="Text 16"/>
-          <p:cNvSpPr/>
-          <p:nvPr/>
-        </p:nvSpPr>
-        <p:spPr>
-          <a:xfrm>
-            <a:off x="822960" y="5943600"/>
-            <a:ext cx="10698480" cy="640080"/>
-          </a:xfrm>
-          <a:prstGeom prst="rect">
-            <a:avLst/>
-          </a:prstGeom>
-          <a:noFill/>
-          <a:ln/>
-        </p:spPr>
-        <p:txBody>
-          <a:bodyPr wrap="square" lIns="0" tIns="0" rIns="0" bIns="0" rtlCol="0" anchor="ctr"/>
-          <a:lstStyle/>
-          <a:p>
-            <a:pPr indent="0" marL="0">
-              <a:buNone/>
-            </a:pPr>
-            <a:r>
-              <a:rPr lang="en-US" sz="1050" i="1" dirty="0">
-                <a:solidFill>
-                  <a:srgbClr val="8A9099"/>
-                </a:solidFill>
-                <a:latin typeface="Arial" pitchFamily="34" charset="0"/>
-                <a:ea typeface="Arial" pitchFamily="34" charset="-122"/>
-                <a:cs typeface="Arial" pitchFamily="34" charset="-120"/>
-              </a:rPr>
-              <a:t>Alle Annahmen offen dokumentiert – Details und Herleitung: Entscheidungsvorlage für die Geschäftsführung. Marktpreise Kauf-Software (CMMS): 20–100 €/Nutzer/Monat, konkrete Pakete 69–80 €; Einführung 50–150 % der Jahreslizenz [2][3].</a:t>
+              <a:t>Warum so viel? Weil eine Kauf-Software jedes Jahr Lizenz kostet und im ersten Jahr zusätzlich die Einführung (Datenübernahme, Anpassung, Schulung) fällig wäre – der Zeitgewinn kommt jedes Jahr obendrauf. Vollständige Herleitung mit allen Annahmen: Entscheidungsvorlage für die Geschäftsführung.</a:t>
             </a:r>
             <a:endParaRPr lang="en-US" sz="1050" dirty="0"/>
           </a:p>
@@ -3551,9 +4528,9 @@
 </p:sld>
 </file>
 
-<file path=ppt/slides/slide12.xml><?xml version="1.0" encoding="utf-8"?>
+<file path=ppt/slides/slide13.xml><?xml version="1.0" encoding="utf-8"?>
 <p:sld xmlns:a="http://schemas.openxmlformats.org/drawingml/2006/main" xmlns:r="http://schemas.openxmlformats.org/officeDocument/2006/relationships" xmlns:p="http://schemas.openxmlformats.org/presentationml/2006/main">
-  <p:cSld name="Slide 12">
+  <p:cSld name="Slide 13">
     <p:bg>
       <p:bgPr>
         <a:solidFill>
@@ -3714,7 +4691,7 @@
                 <a:ea typeface="Arial" pitchFamily="34" charset="-122"/>
                 <a:cs typeface="Arial" pitchFamily="34" charset="-120"/>
               </a:rPr>
-              <a:t>Jährliche Überprüfung – inklusive der Frage „selbst weiter oder kaufen?“</a:t>
+              <a:t>Schwesterwerk bei Interesse: eigene, eigenständige Ausgabe – eigene Datendatei, eigene Einstellungen über das Zahnrad-Menü, kein Verbund nötig</a:t>
             </a:r>
             <a:endParaRPr lang="en-US" sz="1550" dirty="0"/>
           </a:p>
@@ -7034,7 +8011,7 @@
                 <a:ea typeface="Arial" pitchFamily="34" charset="-122"/>
                 <a:cs typeface="Arial" pitchFamily="34" charset="-120"/>
               </a:rPr>
-              <a:t>alles + Benutzer pflegen (Leitung + Vertretung)</a:t>
+              <a:t>alles + Benutzer pflegen – Leitung UND Vertretung, gleichberechtigt</a:t>
             </a:r>
             <a:endParaRPr lang="en-US" sz="1150" dirty="0"/>
           </a:p>
@@ -7259,7 +8236,7 @@
         <p:spPr>
           <a:xfrm>
             <a:off x="822960" y="4892040"/>
-            <a:ext cx="5394960" cy="1463040"/>
+            <a:ext cx="5394960" cy="1554480"/>
           </a:xfrm>
           <a:prstGeom prst="rect">
             <a:avLst/>
@@ -7303,7 +8280,7 @@
                 <a:ea typeface="Arial" pitchFamily="34" charset="-122"/>
                 <a:cs typeface="Arial" pitchFamily="34" charset="-120"/>
               </a:rPr>
-              <a:t>Von außen (Internet) nicht erreichbar – kein Server, keine offenen Zugänge; die Daten liegen ausschließlich im Firmennetz, gesichert durch die IT-Laufwerksicherung.</a:t>
+              <a:t>Und wenn die Leitung nicht im Haus ist oder länger ausfällt? Die Vertretung ist Verwalter mit denselben Rechten – Benutzer, Rechte und Einstellungen pflegt sie genauso. Nichts hängt an einer Person: Programm und Daten liegen im Firmennetz.</a:t>
             </a:r>
             <a:endParaRPr lang="en-US" sz="1300" dirty="0"/>
           </a:p>
